--- a/backend/CERTIFICATE_TEMPLATE.pptx
+++ b/backend/CERTIFICATE_TEMPLATE.pptx
@@ -5058,7 +5058,7 @@
         </p:nvSpPr>
         <p:spPr>
           <a:xfrm>
-            <a:off x="5276850" y="9819005"/>
+            <a:off x="5276850" y="9514205"/>
             <a:ext cx="4059555" cy="334645"/>
           </a:xfrm>
           <a:prstGeom prst="rect">

--- a/backend/CERTIFICATE_TEMPLATE.pptx
+++ b/backend/CERTIFICATE_TEMPLATE.pptx
@@ -4018,6 +4018,12 @@
             </a:stretch>
           </a:blipFill>
         </p:spPr>
+        <p:txBody>
+          <a:bodyPr/>
+          <a:p>
+            <a:endParaRPr lang="en-US"/>
+          </a:p>
+        </p:txBody>
       </p:sp>
       <p:sp>
         <p:nvSpPr>

--- a/backend/CERTIFICATE_TEMPLATE.pptx
+++ b/backend/CERTIFICATE_TEMPLATE.pptx
@@ -3975,58 +3975,6 @@
       </p:sp>
       <p:sp>
         <p:nvSpPr>
-          <p:cNvPr id="21" name="Freeform 21"/>
-          <p:cNvSpPr/>
-          <p:nvPr/>
-        </p:nvSpPr>
-        <p:spPr>
-          <a:xfrm>
-            <a:off x="2667000" y="671993"/>
-            <a:ext cx="1215974" cy="1215974"/>
-          </a:xfrm>
-          <a:custGeom>
-            <a:avLst/>
-            <a:gdLst/>
-            <a:ahLst/>
-            <a:cxnLst/>
-            <a:rect l="l" t="t" r="r" b="b"/>
-            <a:pathLst>
-              <a:path w="1215974" h="1215974">
-                <a:moveTo>
-                  <a:pt x="0" y="0"/>
-                </a:moveTo>
-                <a:lnTo>
-                  <a:pt x="1215974" y="0"/>
-                </a:lnTo>
-                <a:lnTo>
-                  <a:pt x="1215974" y="1215974"/>
-                </a:lnTo>
-                <a:lnTo>
-                  <a:pt x="0" y="1215974"/>
-                </a:lnTo>
-                <a:lnTo>
-                  <a:pt x="0" y="0"/>
-                </a:lnTo>
-                <a:close/>
-              </a:path>
-            </a:pathLst>
-          </a:custGeom>
-          <a:blipFill>
-            <a:blip r:embed="rId18"/>
-            <a:stretch>
-              <a:fillRect l="-383988" t="-17790" r="-6191" b="-20105"/>
-            </a:stretch>
-          </a:blipFill>
-        </p:spPr>
-        <p:txBody>
-          <a:bodyPr/>
-          <a:p>
-            <a:endParaRPr lang="en-US"/>
-          </a:p>
-        </p:txBody>
-      </p:sp>
-      <p:sp>
-        <p:nvSpPr>
           <p:cNvPr id="22" name="Freeform 22"/>
           <p:cNvSpPr/>
           <p:nvPr/>
@@ -4064,7 +4012,7 @@
             </a:pathLst>
           </a:custGeom>
           <a:blipFill>
-            <a:blip r:embed="rId19"/>
+            <a:blip r:embed="rId18"/>
             <a:stretch>
               <a:fillRect/>
             </a:stretch>
@@ -4110,7 +4058,7 @@
             </a:pathLst>
           </a:custGeom>
           <a:blipFill>
-            <a:blip r:embed="rId20"/>
+            <a:blip r:embed="rId19"/>
             <a:stretch>
               <a:fillRect/>
             </a:stretch>
@@ -4156,7 +4104,7 @@
             </a:pathLst>
           </a:custGeom>
           <a:blipFill>
-            <a:blip r:embed="rId21"/>
+            <a:blip r:embed="rId20"/>
             <a:stretch>
               <a:fillRect/>
             </a:stretch>
@@ -4202,7 +4150,7 @@
             </a:pathLst>
           </a:custGeom>
           <a:blipFill>
-            <a:blip r:embed="rId22"/>
+            <a:blip r:embed="rId21"/>
             <a:stretch>
               <a:fillRect/>
             </a:stretch>
@@ -5102,6 +5050,30 @@
           </a:p>
         </p:txBody>
       </p:sp>
+      <p:pic>
+        <p:nvPicPr>
+          <p:cNvPr id="41" name="Picture 40"/>
+          <p:cNvPicPr>
+            <a:picLocks noChangeAspect="1"/>
+          </p:cNvPicPr>
+          <p:nvPr/>
+        </p:nvPicPr>
+        <p:blipFill>
+          <a:blip r:embed="rId22"/>
+          <a:stretch>
+            <a:fillRect/>
+          </a:stretch>
+        </p:blipFill>
+        <p:spPr>
+          <a:xfrm>
+            <a:off x="2686050" y="657860"/>
+            <a:ext cx="1196340" cy="1165860"/>
+          </a:xfrm>
+          <a:prstGeom prst="rect">
+            <a:avLst/>
+          </a:prstGeom>
+        </p:spPr>
+      </p:pic>
     </p:spTree>
   </p:cSld>
   <p:clrMapOvr>
